--- a/assets/pptx/catalog-31.pptx
+++ b/assets/pptx/catalog-31.pptx
@@ -3256,7 +3256,7 @@
                 <a:ea typeface="Ebrima"/>
                 <a:cs typeface="Ebrima"/>
               </a:rPr>
-              <a:t>አዶናይ ኢየሱስ የበላይ (8x)</a:t>
+              <a:t>አዶናይ ኢየሱስ የበላይ 8x</a:t>
             </a:r>
           </a:p>
         </p:txBody>
@@ -3462,7 +3462,7 @@
                 <a:ea typeface="Ebrima"/>
                 <a:cs typeface="Ebrima"/>
               </a:rPr>
-              <a:t>ጌታ ኢየሱስ ለዘለዓለም (ነው (3x))</a:t>
+              <a:t>ጌታ ኢየሱስ ለዘለዓለም ነው 3x</a:t>
             </a:r>
           </a:p>
           <a:p>
@@ -3498,7 +3498,7 @@
                 <a:ea typeface="Ebrima"/>
                 <a:cs typeface="Ebrima"/>
               </a:rPr>
-              <a:t>የእኔ ኢየሱስ ባለ ግርማ (ነው (3x))</a:t>
+              <a:t>የእኔ ኢየሱስ ባለ ግርማ ነው 3x</a:t>
             </a:r>
           </a:p>
           <a:p>
@@ -3534,7 +3534,7 @@
                 <a:ea typeface="Ebrima"/>
                 <a:cs typeface="Ebrima"/>
               </a:rPr>
-              <a:t>የእኔ ኢየሱስ ብቸኛ ጌታ (ነው (3x))</a:t>
+              <a:t>የእኔ ኢየሱስ ብቸኛ ጌታ ነው 3x</a:t>
             </a:r>
           </a:p>
         </p:txBody>
@@ -3601,7 +3601,7 @@
                 <a:ea typeface="Ebrima"/>
                 <a:cs typeface="Ebrima"/>
               </a:rPr>
-              <a:t>ከፍ ያለ በከፍታ ላይ (3x)</a:t>
+              <a:t>ከፍ ያለ በከፍታ ላይ 3x</a:t>
             </a:r>
           </a:p>
           <a:p>
@@ -3637,7 +3637,7 @@
                 <a:ea typeface="Ebrima"/>
                 <a:cs typeface="Ebrima"/>
               </a:rPr>
-              <a:t>ከፍ ያለ በከፍታ ላይ (3x)</a:t>
+              <a:t>ከፍ ያለ በከፍታ ላይ 3x</a:t>
             </a:r>
           </a:p>
           <a:p>
@@ -3843,7 +3843,7 @@
                 <a:ea typeface="Ebrima"/>
                 <a:cs typeface="Ebrima"/>
               </a:rPr>
-              <a:t>ከፍ ያለ በከፍታ ላይ (3x)</a:t>
+              <a:t>ከፍ ያለ በከፍታ ላይ 3x</a:t>
             </a:r>
           </a:p>
           <a:p>
@@ -3879,7 +3879,7 @@
                 <a:ea typeface="Ebrima"/>
                 <a:cs typeface="Ebrima"/>
               </a:rPr>
-              <a:t>ከፍ ያለ በከፍታ ላይ (3x)</a:t>
+              <a:t>ከፍ ያለ በከፍታ ላይ 3x</a:t>
             </a:r>
           </a:p>
           <a:p>
@@ -3982,7 +3982,7 @@
                 <a:ea typeface="Ebrima"/>
                 <a:cs typeface="Ebrima"/>
               </a:rPr>
-              <a:t>ጌታ ኢየሱስ ለዘለዓለም (ነው (3x))</a:t>
+              <a:t>ጌታ ኢየሱስ ለዘለዓለም ነው 3x</a:t>
             </a:r>
           </a:p>
           <a:p>
@@ -4018,7 +4018,7 @@
                 <a:ea typeface="Ebrima"/>
                 <a:cs typeface="Ebrima"/>
               </a:rPr>
-              <a:t>የእኔ ኢየሱስ ባለ ግርማ (ነው (3x))</a:t>
+              <a:t>የእኔ ኢየሱስ ባለ ግርማ ነው 3x</a:t>
             </a:r>
           </a:p>
           <a:p>
@@ -4054,7 +4054,7 @@
                 <a:ea typeface="Ebrima"/>
                 <a:cs typeface="Ebrima"/>
               </a:rPr>
-              <a:t>የእኔ ኢየሱስ ብቸኛ ጌታ (ነው (3x))</a:t>
+              <a:t>የእኔ ኢየሱስ ብቸኛ ጌታ ነው 3x</a:t>
             </a:r>
           </a:p>
         </p:txBody>
@@ -4121,7 +4121,7 @@
                 <a:ea typeface="Ebrima"/>
                 <a:cs typeface="Ebrima"/>
               </a:rPr>
-              <a:t>የበላይ ኢየሱስ የበላይ (4x)</a:t>
+              <a:t>የበላይ ኢየሱስ የበላይ 4x</a:t>
             </a:r>
           </a:p>
           <a:p>
@@ -4139,7 +4139,7 @@
                 <a:ea typeface="Ebrima"/>
                 <a:cs typeface="Ebrima"/>
               </a:rPr>
-              <a:t>አዶናይ ኢየሱስ የበላይ (4x)</a:t>
+              <a:t>አዶናይ ኢየሱስ የበላይ 4x</a:t>
             </a:r>
           </a:p>
         </p:txBody>
@@ -4448,7 +4448,7 @@
                 <a:ea typeface="Ebrima"/>
                 <a:cs typeface="Ebrima"/>
               </a:rPr>
-              <a:t>የበላይ ኢየሱስ የበላይ (4x)</a:t>
+              <a:t>የበላይ ኢየሱስ የበላይ 4x</a:t>
             </a:r>
           </a:p>
           <a:p>
@@ -4466,7 +4466,7 @@
                 <a:ea typeface="Ebrima"/>
                 <a:cs typeface="Ebrima"/>
               </a:rPr>
-              <a:t>አዶናይ ኢየሱስ የበላይ (4x)</a:t>
+              <a:t>አዶናይ ኢየሱስ የበላይ 4x</a:t>
             </a:r>
           </a:p>
         </p:txBody>
@@ -4654,7 +4654,7 @@
                 <a:ea typeface="Ebrima"/>
                 <a:cs typeface="Ebrima"/>
               </a:rPr>
-              <a:t>ከፍ ያለ በከፍታ ላይ (3x)</a:t>
+              <a:t>ከፍ ያለ በከፍታ ላይ 3x</a:t>
             </a:r>
           </a:p>
           <a:p>
@@ -4690,7 +4690,7 @@
                 <a:ea typeface="Ebrima"/>
                 <a:cs typeface="Ebrima"/>
               </a:rPr>
-              <a:t>ከፍ ያለ በከፍታ ላይ (3x)</a:t>
+              <a:t>ከፍ ያለ በከፍታ ላይ 3x</a:t>
             </a:r>
           </a:p>
           <a:p>
@@ -4793,7 +4793,7 @@
                 <a:ea typeface="Ebrima"/>
                 <a:cs typeface="Ebrima"/>
               </a:rPr>
-              <a:t>ጌታ ኢየሱስ ለዘለዓለም (ነው (3x))</a:t>
+              <a:t>ጌታ ኢየሱስ ለዘለዓለም ነው 3x</a:t>
             </a:r>
           </a:p>
           <a:p>
@@ -4829,7 +4829,7 @@
                 <a:ea typeface="Ebrima"/>
                 <a:cs typeface="Ebrima"/>
               </a:rPr>
-              <a:t>የእኔ ኢየሱስ ባለ ግርማ (ነው (3x))</a:t>
+              <a:t>የእኔ ኢየሱስ ባለ ግርማ ነው 3x</a:t>
             </a:r>
           </a:p>
           <a:p>
@@ -4865,7 +4865,7 @@
                 <a:ea typeface="Ebrima"/>
                 <a:cs typeface="Ebrima"/>
               </a:rPr>
-              <a:t>የእኔ ኢየሱስ ብቸኛ ጌታ (ነው (3x))</a:t>
+              <a:t>የእኔ ኢየሱስ ብቸኛ ጌታ ነው 3x</a:t>
             </a:r>
           </a:p>
         </p:txBody>
@@ -4932,7 +4932,7 @@
                 <a:ea typeface="Ebrima"/>
                 <a:cs typeface="Ebrima"/>
               </a:rPr>
-              <a:t>ከፍ ያለ በከፍታ ላይ (3x)</a:t>
+              <a:t>ከፍ ያለ በከፍታ ላይ 3x</a:t>
             </a:r>
           </a:p>
           <a:p>
@@ -4968,7 +4968,7 @@
                 <a:ea typeface="Ebrima"/>
                 <a:cs typeface="Ebrima"/>
               </a:rPr>
-              <a:t>ከፍ ያለ በከፍታ ላይ (3x)</a:t>
+              <a:t>ከፍ ያለ በከፍታ ላይ 3x</a:t>
             </a:r>
           </a:p>
           <a:p>
